--- a/宣道詩/(宣道詩234) 教會復興.pptx
+++ b/宣道詩/(宣道詩234) 教會復興.pptx
@@ -5,17 +5,18 @@
     <p:sldMasterId id="2147483660" r:id="rId1"/>
   </p:sldMasterIdLst>
   <p:notesMasterIdLst>
-    <p:notesMasterId r:id="rId7"/>
+    <p:notesMasterId r:id="rId8"/>
   </p:notesMasterIdLst>
   <p:handoutMasterIdLst>
-    <p:handoutMasterId r:id="rId8"/>
+    <p:handoutMasterId r:id="rId9"/>
   </p:handoutMasterIdLst>
   <p:sldIdLst>
-    <p:sldId id="1601" r:id="rId2"/>
-    <p:sldId id="1602" r:id="rId3"/>
-    <p:sldId id="1603" r:id="rId4"/>
-    <p:sldId id="1604" r:id="rId5"/>
-    <p:sldId id="1605" r:id="rId6"/>
+    <p:sldId id="393" r:id="rId2"/>
+    <p:sldId id="412" r:id="rId3"/>
+    <p:sldId id="1606" r:id="rId4"/>
+    <p:sldId id="1607" r:id="rId5"/>
+    <p:sldId id="1608" r:id="rId6"/>
+    <p:sldId id="1609" r:id="rId7"/>
   </p:sldIdLst>
   <p:sldSz cx="12192000" cy="6858000"/>
   <p:notesSz cx="6858000" cy="9144000"/>
@@ -314,6 +315,11 @@
         </p:txBody>
       </p:sp>
     </p:spTree>
+    <p:extLst>
+      <p:ext uri="{BB962C8B-B14F-4D97-AF65-F5344CB8AC3E}">
+        <p14:creationId xmlns:p14="http://schemas.microsoft.com/office/powerpoint/2010/main" val="1"/>
+      </p:ext>
+    </p:extLst>
   </p:cSld>
   <p:clrMap bg1="lt1" tx1="dk1" bg2="lt2" tx2="dk2" accent1="accent1" accent2="accent2" accent3="accent3" accent4="accent4" accent5="accent5" accent6="accent6" hlink="hlink" folHlink="folHlink"/>
 </p:handoutMaster>
@@ -463,38 +469,37 @@
           <a:p>
             <a:pPr lvl="0"/>
             <a:r>
-              <a:rPr lang="zh-TW" altLang="en-US" smtClean="0"/>
+              <a:rPr lang="zh-TW" altLang="en-US"/>
               <a:t>按一下以編輯母片文字樣式</a:t>
             </a:r>
           </a:p>
           <a:p>
             <a:pPr lvl="1"/>
             <a:r>
-              <a:rPr lang="zh-TW" altLang="en-US" smtClean="0"/>
+              <a:rPr lang="zh-TW" altLang="en-US"/>
               <a:t>第二層</a:t>
             </a:r>
           </a:p>
           <a:p>
             <a:pPr lvl="2"/>
             <a:r>
-              <a:rPr lang="zh-TW" altLang="en-US" smtClean="0"/>
+              <a:rPr lang="zh-TW" altLang="en-US"/>
               <a:t>第三層</a:t>
             </a:r>
           </a:p>
           <a:p>
             <a:pPr lvl="3"/>
             <a:r>
-              <a:rPr lang="zh-TW" altLang="en-US" smtClean="0"/>
+              <a:rPr lang="zh-TW" altLang="en-US"/>
               <a:t>第四層</a:t>
             </a:r>
           </a:p>
           <a:p>
             <a:pPr lvl="4"/>
             <a:r>
-              <a:rPr lang="zh-TW" altLang="en-US" smtClean="0"/>
+              <a:rPr lang="zh-TW" altLang="en-US"/>
               <a:t>第五層</a:t>
             </a:r>
-            <a:endParaRPr lang="zh-TW" altLang="en-US"/>
           </a:p>
         </p:txBody>
       </p:sp>
@@ -700,7 +705,7 @@
           <a:lstStyle/>
           <a:p>
             <a:r>
-              <a:rPr lang="en-US" altLang="zh-TW" smtClean="0"/>
+              <a:rPr lang="en-US" altLang="zh-TW"/>
               <a:t>Click to edit Master title style</a:t>
             </a:r>
             <a:endParaRPr lang="zh-TW" altLang="en-US"/>
@@ -819,7 +824,7 @@
           </a:lstStyle>
           <a:p>
             <a:r>
-              <a:rPr lang="en-US" altLang="zh-TW" smtClean="0"/>
+              <a:rPr lang="en-US" altLang="zh-TW"/>
               <a:t>Click to edit Master subtitle style</a:t>
             </a:r>
             <a:endParaRPr lang="zh-TW" altLang="en-US"/>
@@ -942,7 +947,7 @@
           <a:lstStyle/>
           <a:p>
             <a:r>
-              <a:rPr lang="en-US" altLang="zh-TW" smtClean="0"/>
+              <a:rPr lang="en-US" altLang="zh-TW"/>
               <a:t>Click to edit Master title style</a:t>
             </a:r>
             <a:endParaRPr lang="zh-TW" altLang="en-US"/>
@@ -966,35 +971,35 @@
           <a:p>
             <a:pPr lvl="0"/>
             <a:r>
-              <a:rPr lang="en-US" altLang="zh-TW" smtClean="0"/>
+              <a:rPr lang="en-US" altLang="zh-TW"/>
               <a:t>Edit Master text styles</a:t>
             </a:r>
           </a:p>
           <a:p>
             <a:pPr lvl="1"/>
             <a:r>
-              <a:rPr lang="en-US" altLang="zh-TW" smtClean="0"/>
+              <a:rPr lang="en-US" altLang="zh-TW"/>
               <a:t>Second level</a:t>
             </a:r>
           </a:p>
           <a:p>
             <a:pPr lvl="2"/>
             <a:r>
-              <a:rPr lang="en-US" altLang="zh-TW" smtClean="0"/>
+              <a:rPr lang="en-US" altLang="zh-TW"/>
               <a:t>Third level</a:t>
             </a:r>
           </a:p>
           <a:p>
             <a:pPr lvl="3"/>
             <a:r>
-              <a:rPr lang="en-US" altLang="zh-TW" smtClean="0"/>
+              <a:rPr lang="en-US" altLang="zh-TW"/>
               <a:t>Fourth level</a:t>
             </a:r>
           </a:p>
           <a:p>
             <a:pPr lvl="4"/>
             <a:r>
-              <a:rPr lang="en-US" altLang="zh-TW" smtClean="0"/>
+              <a:rPr lang="en-US" altLang="zh-TW"/>
               <a:t>Fifth level</a:t>
             </a:r>
             <a:endParaRPr lang="zh-TW" altLang="en-US"/>
@@ -1122,7 +1127,7 @@
           <a:lstStyle/>
           <a:p>
             <a:r>
-              <a:rPr lang="en-US" altLang="zh-TW" smtClean="0"/>
+              <a:rPr lang="en-US" altLang="zh-TW"/>
               <a:t>Click to edit Master title style</a:t>
             </a:r>
             <a:endParaRPr lang="zh-TW" altLang="en-US"/>
@@ -1151,35 +1156,35 @@
           <a:p>
             <a:pPr lvl="0"/>
             <a:r>
-              <a:rPr lang="en-US" altLang="zh-TW" smtClean="0"/>
+              <a:rPr lang="en-US" altLang="zh-TW"/>
               <a:t>Edit Master text styles</a:t>
             </a:r>
           </a:p>
           <a:p>
             <a:pPr lvl="1"/>
             <a:r>
-              <a:rPr lang="en-US" altLang="zh-TW" smtClean="0"/>
+              <a:rPr lang="en-US" altLang="zh-TW"/>
               <a:t>Second level</a:t>
             </a:r>
           </a:p>
           <a:p>
             <a:pPr lvl="2"/>
             <a:r>
-              <a:rPr lang="en-US" altLang="zh-TW" smtClean="0"/>
+              <a:rPr lang="en-US" altLang="zh-TW"/>
               <a:t>Third level</a:t>
             </a:r>
           </a:p>
           <a:p>
             <a:pPr lvl="3"/>
             <a:r>
-              <a:rPr lang="en-US" altLang="zh-TW" smtClean="0"/>
+              <a:rPr lang="en-US" altLang="zh-TW"/>
               <a:t>Fourth level</a:t>
             </a:r>
           </a:p>
           <a:p>
             <a:pPr lvl="4"/>
             <a:r>
-              <a:rPr lang="en-US" altLang="zh-TW" smtClean="0"/>
+              <a:rPr lang="en-US" altLang="zh-TW"/>
               <a:t>Fifth level</a:t>
             </a:r>
             <a:endParaRPr lang="zh-TW" altLang="en-US"/>
@@ -1302,7 +1307,7 @@
           <a:lstStyle/>
           <a:p>
             <a:r>
-              <a:rPr lang="en-US" altLang="zh-TW" smtClean="0"/>
+              <a:rPr lang="en-US" altLang="zh-TW"/>
               <a:t>Click to edit Master title style</a:t>
             </a:r>
             <a:endParaRPr lang="zh-TW" altLang="en-US"/>
@@ -1326,35 +1331,35 @@
           <a:p>
             <a:pPr lvl="0"/>
             <a:r>
-              <a:rPr lang="en-US" altLang="zh-TW" smtClean="0"/>
+              <a:rPr lang="en-US" altLang="zh-TW"/>
               <a:t>Edit Master text styles</a:t>
             </a:r>
           </a:p>
           <a:p>
             <a:pPr lvl="1"/>
             <a:r>
-              <a:rPr lang="en-US" altLang="zh-TW" smtClean="0"/>
+              <a:rPr lang="en-US" altLang="zh-TW"/>
               <a:t>Second level</a:t>
             </a:r>
           </a:p>
           <a:p>
             <a:pPr lvl="2"/>
             <a:r>
-              <a:rPr lang="en-US" altLang="zh-TW" smtClean="0"/>
+              <a:rPr lang="en-US" altLang="zh-TW"/>
               <a:t>Third level</a:t>
             </a:r>
           </a:p>
           <a:p>
             <a:pPr lvl="3"/>
             <a:r>
-              <a:rPr lang="en-US" altLang="zh-TW" smtClean="0"/>
+              <a:rPr lang="en-US" altLang="zh-TW"/>
               <a:t>Fourth level</a:t>
             </a:r>
           </a:p>
           <a:p>
             <a:pPr lvl="4"/>
             <a:r>
-              <a:rPr lang="en-US" altLang="zh-TW" smtClean="0"/>
+              <a:rPr lang="en-US" altLang="zh-TW"/>
               <a:t>Fifth level</a:t>
             </a:r>
             <a:endParaRPr lang="zh-TW" altLang="en-US"/>
@@ -1486,7 +1491,7 @@
           </a:lstStyle>
           <a:p>
             <a:r>
-              <a:rPr lang="en-US" altLang="zh-TW" smtClean="0"/>
+              <a:rPr lang="en-US" altLang="zh-TW"/>
               <a:t>Click to edit Master title style</a:t>
             </a:r>
             <a:endParaRPr lang="zh-TW" altLang="en-US"/>
@@ -1606,7 +1611,7 @@
           <a:p>
             <a:pPr lvl="0"/>
             <a:r>
-              <a:rPr lang="en-US" altLang="zh-TW" smtClean="0"/>
+              <a:rPr lang="en-US" altLang="zh-TW"/>
               <a:t>Edit Master text styles</a:t>
             </a:r>
           </a:p>
@@ -1728,7 +1733,7 @@
           <a:lstStyle/>
           <a:p>
             <a:r>
-              <a:rPr lang="en-US" altLang="zh-TW" smtClean="0"/>
+              <a:rPr lang="en-US" altLang="zh-TW"/>
               <a:t>Click to edit Master title style</a:t>
             </a:r>
             <a:endParaRPr lang="zh-TW" altLang="en-US"/>
@@ -1785,35 +1790,35 @@
           <a:p>
             <a:pPr lvl="0"/>
             <a:r>
-              <a:rPr lang="en-US" altLang="zh-TW" smtClean="0"/>
+              <a:rPr lang="en-US" altLang="zh-TW"/>
               <a:t>Edit Master text styles</a:t>
             </a:r>
           </a:p>
           <a:p>
             <a:pPr lvl="1"/>
             <a:r>
-              <a:rPr lang="en-US" altLang="zh-TW" smtClean="0"/>
+              <a:rPr lang="en-US" altLang="zh-TW"/>
               <a:t>Second level</a:t>
             </a:r>
           </a:p>
           <a:p>
             <a:pPr lvl="2"/>
             <a:r>
-              <a:rPr lang="en-US" altLang="zh-TW" smtClean="0"/>
+              <a:rPr lang="en-US" altLang="zh-TW"/>
               <a:t>Third level</a:t>
             </a:r>
           </a:p>
           <a:p>
             <a:pPr lvl="3"/>
             <a:r>
-              <a:rPr lang="en-US" altLang="zh-TW" smtClean="0"/>
+              <a:rPr lang="en-US" altLang="zh-TW"/>
               <a:t>Fourth level</a:t>
             </a:r>
           </a:p>
           <a:p>
             <a:pPr lvl="4"/>
             <a:r>
-              <a:rPr lang="en-US" altLang="zh-TW" smtClean="0"/>
+              <a:rPr lang="en-US" altLang="zh-TW"/>
               <a:t>Fifth level</a:t>
             </a:r>
             <a:endParaRPr lang="zh-TW" altLang="en-US"/>
@@ -1870,35 +1875,35 @@
           <a:p>
             <a:pPr lvl="0"/>
             <a:r>
-              <a:rPr lang="en-US" altLang="zh-TW" smtClean="0"/>
+              <a:rPr lang="en-US" altLang="zh-TW"/>
               <a:t>Edit Master text styles</a:t>
             </a:r>
           </a:p>
           <a:p>
             <a:pPr lvl="1"/>
             <a:r>
-              <a:rPr lang="en-US" altLang="zh-TW" smtClean="0"/>
+              <a:rPr lang="en-US" altLang="zh-TW"/>
               <a:t>Second level</a:t>
             </a:r>
           </a:p>
           <a:p>
             <a:pPr lvl="2"/>
             <a:r>
-              <a:rPr lang="en-US" altLang="zh-TW" smtClean="0"/>
+              <a:rPr lang="en-US" altLang="zh-TW"/>
               <a:t>Third level</a:t>
             </a:r>
           </a:p>
           <a:p>
             <a:pPr lvl="3"/>
             <a:r>
-              <a:rPr lang="en-US" altLang="zh-TW" smtClean="0"/>
+              <a:rPr lang="en-US" altLang="zh-TW"/>
               <a:t>Fourth level</a:t>
             </a:r>
           </a:p>
           <a:p>
             <a:pPr lvl="4"/>
             <a:r>
-              <a:rPr lang="en-US" altLang="zh-TW" smtClean="0"/>
+              <a:rPr lang="en-US" altLang="zh-TW"/>
               <a:t>Fifth level</a:t>
             </a:r>
             <a:endParaRPr lang="zh-TW" altLang="en-US"/>
@@ -2025,7 +2030,7 @@
           </a:lstStyle>
           <a:p>
             <a:r>
-              <a:rPr lang="en-US" altLang="zh-TW" smtClean="0"/>
+              <a:rPr lang="en-US" altLang="zh-TW"/>
               <a:t>Click to edit Master title style</a:t>
             </a:r>
             <a:endParaRPr lang="zh-TW" altLang="en-US"/>
@@ -2091,7 +2096,7 @@
           <a:p>
             <a:pPr lvl="0"/>
             <a:r>
-              <a:rPr lang="en-US" altLang="zh-TW" smtClean="0"/>
+              <a:rPr lang="en-US" altLang="zh-TW"/>
               <a:t>Edit Master text styles</a:t>
             </a:r>
           </a:p>
@@ -2147,35 +2152,35 @@
           <a:p>
             <a:pPr lvl="0"/>
             <a:r>
-              <a:rPr lang="en-US" altLang="zh-TW" smtClean="0"/>
+              <a:rPr lang="en-US" altLang="zh-TW"/>
               <a:t>Edit Master text styles</a:t>
             </a:r>
           </a:p>
           <a:p>
             <a:pPr lvl="1"/>
             <a:r>
-              <a:rPr lang="en-US" altLang="zh-TW" smtClean="0"/>
+              <a:rPr lang="en-US" altLang="zh-TW"/>
               <a:t>Second level</a:t>
             </a:r>
           </a:p>
           <a:p>
             <a:pPr lvl="2"/>
             <a:r>
-              <a:rPr lang="en-US" altLang="zh-TW" smtClean="0"/>
+              <a:rPr lang="en-US" altLang="zh-TW"/>
               <a:t>Third level</a:t>
             </a:r>
           </a:p>
           <a:p>
             <a:pPr lvl="3"/>
             <a:r>
-              <a:rPr lang="en-US" altLang="zh-TW" smtClean="0"/>
+              <a:rPr lang="en-US" altLang="zh-TW"/>
               <a:t>Fourth level</a:t>
             </a:r>
           </a:p>
           <a:p>
             <a:pPr lvl="4"/>
             <a:r>
-              <a:rPr lang="en-US" altLang="zh-TW" smtClean="0"/>
+              <a:rPr lang="en-US" altLang="zh-TW"/>
               <a:t>Fifth level</a:t>
             </a:r>
             <a:endParaRPr lang="zh-TW" altLang="en-US"/>
@@ -2241,7 +2246,7 @@
           <a:p>
             <a:pPr lvl="0"/>
             <a:r>
-              <a:rPr lang="en-US" altLang="zh-TW" smtClean="0"/>
+              <a:rPr lang="en-US" altLang="zh-TW"/>
               <a:t>Edit Master text styles</a:t>
             </a:r>
           </a:p>
@@ -2297,35 +2302,35 @@
           <a:p>
             <a:pPr lvl="0"/>
             <a:r>
-              <a:rPr lang="en-US" altLang="zh-TW" smtClean="0"/>
+              <a:rPr lang="en-US" altLang="zh-TW"/>
               <a:t>Edit Master text styles</a:t>
             </a:r>
           </a:p>
           <a:p>
             <a:pPr lvl="1"/>
             <a:r>
-              <a:rPr lang="en-US" altLang="zh-TW" smtClean="0"/>
+              <a:rPr lang="en-US" altLang="zh-TW"/>
               <a:t>Second level</a:t>
             </a:r>
           </a:p>
           <a:p>
             <a:pPr lvl="2"/>
             <a:r>
-              <a:rPr lang="en-US" altLang="zh-TW" smtClean="0"/>
+              <a:rPr lang="en-US" altLang="zh-TW"/>
               <a:t>Third level</a:t>
             </a:r>
           </a:p>
           <a:p>
             <a:pPr lvl="3"/>
             <a:r>
-              <a:rPr lang="en-US" altLang="zh-TW" smtClean="0"/>
+              <a:rPr lang="en-US" altLang="zh-TW"/>
               <a:t>Fourth level</a:t>
             </a:r>
           </a:p>
           <a:p>
             <a:pPr lvl="4"/>
             <a:r>
-              <a:rPr lang="en-US" altLang="zh-TW" smtClean="0"/>
+              <a:rPr lang="en-US" altLang="zh-TW"/>
               <a:t>Fifth level</a:t>
             </a:r>
             <a:endParaRPr lang="zh-TW" altLang="en-US"/>
@@ -2448,7 +2453,7 @@
           <a:lstStyle/>
           <a:p>
             <a:r>
-              <a:rPr lang="en-US" altLang="zh-TW" smtClean="0"/>
+              <a:rPr lang="en-US" altLang="zh-TW"/>
               <a:t>Click to edit Master title style</a:t>
             </a:r>
             <a:endParaRPr lang="zh-TW" altLang="en-US"/>
@@ -2680,7 +2685,7 @@
           </a:lstStyle>
           <a:p>
             <a:r>
-              <a:rPr lang="en-US" altLang="zh-TW" smtClean="0"/>
+              <a:rPr lang="en-US" altLang="zh-TW"/>
               <a:t>Click to edit Master title style</a:t>
             </a:r>
             <a:endParaRPr lang="zh-TW" altLang="en-US"/>
@@ -2737,35 +2742,35 @@
           <a:p>
             <a:pPr lvl="0"/>
             <a:r>
-              <a:rPr lang="en-US" altLang="zh-TW" smtClean="0"/>
+              <a:rPr lang="en-US" altLang="zh-TW"/>
               <a:t>Edit Master text styles</a:t>
             </a:r>
           </a:p>
           <a:p>
             <a:pPr lvl="1"/>
             <a:r>
-              <a:rPr lang="en-US" altLang="zh-TW" smtClean="0"/>
+              <a:rPr lang="en-US" altLang="zh-TW"/>
               <a:t>Second level</a:t>
             </a:r>
           </a:p>
           <a:p>
             <a:pPr lvl="2"/>
             <a:r>
-              <a:rPr lang="en-US" altLang="zh-TW" smtClean="0"/>
+              <a:rPr lang="en-US" altLang="zh-TW"/>
               <a:t>Third level</a:t>
             </a:r>
           </a:p>
           <a:p>
             <a:pPr lvl="3"/>
             <a:r>
-              <a:rPr lang="en-US" altLang="zh-TW" smtClean="0"/>
+              <a:rPr lang="en-US" altLang="zh-TW"/>
               <a:t>Fourth level</a:t>
             </a:r>
           </a:p>
           <a:p>
             <a:pPr lvl="4"/>
             <a:r>
-              <a:rPr lang="en-US" altLang="zh-TW" smtClean="0"/>
+              <a:rPr lang="en-US" altLang="zh-TW"/>
               <a:t>Fifth level</a:t>
             </a:r>
             <a:endParaRPr lang="zh-TW" altLang="en-US"/>
@@ -2831,7 +2836,7 @@
           <a:p>
             <a:pPr lvl="0"/>
             <a:r>
-              <a:rPr lang="en-US" altLang="zh-TW" smtClean="0"/>
+              <a:rPr lang="en-US" altLang="zh-TW"/>
               <a:t>Edit Master text styles</a:t>
             </a:r>
           </a:p>
@@ -2962,7 +2967,7 @@
           </a:lstStyle>
           <a:p>
             <a:r>
-              <a:rPr lang="en-US" altLang="zh-TW" smtClean="0"/>
+              <a:rPr lang="en-US" altLang="zh-TW"/>
               <a:t>Click to edit Master title style</a:t>
             </a:r>
             <a:endParaRPr lang="zh-TW" altLang="en-US"/>
@@ -3027,7 +3032,7 @@
           </a:lstStyle>
           <a:p>
             <a:r>
-              <a:rPr lang="en-US" altLang="zh-TW" smtClean="0"/>
+              <a:rPr lang="en-US" altLang="zh-TW"/>
               <a:t>Click icon to add picture</a:t>
             </a:r>
             <a:endParaRPr lang="zh-TW" altLang="en-US"/>
@@ -3093,7 +3098,7 @@
           <a:p>
             <a:pPr lvl="0"/>
             <a:r>
-              <a:rPr lang="en-US" altLang="zh-TW" smtClean="0"/>
+              <a:rPr lang="en-US" altLang="zh-TW"/>
               <a:t>Edit Master text styles</a:t>
             </a:r>
           </a:p>
@@ -3235,10 +3240,9 @@
           <a:lstStyle/>
           <a:p>
             <a:r>
-              <a:rPr lang="zh-TW" altLang="en-US" smtClean="0"/>
+              <a:rPr lang="zh-TW" altLang="en-US"/>
               <a:t>按一下以編輯母片標題樣式</a:t>
             </a:r>
-            <a:endParaRPr lang="zh-TW" altLang="en-US"/>
           </a:p>
         </p:txBody>
       </p:sp>
@@ -3269,38 +3273,37 @@
           <a:p>
             <a:pPr lvl="0"/>
             <a:r>
-              <a:rPr lang="zh-TW" altLang="en-US" smtClean="0"/>
+              <a:rPr lang="zh-TW" altLang="en-US"/>
               <a:t>按一下以編輯母片文字樣式</a:t>
             </a:r>
           </a:p>
           <a:p>
             <a:pPr lvl="1"/>
             <a:r>
-              <a:rPr lang="zh-TW" altLang="en-US" smtClean="0"/>
+              <a:rPr lang="zh-TW" altLang="en-US"/>
               <a:t>第二層</a:t>
             </a:r>
           </a:p>
           <a:p>
             <a:pPr lvl="2"/>
             <a:r>
-              <a:rPr lang="zh-TW" altLang="en-US" smtClean="0"/>
+              <a:rPr lang="zh-TW" altLang="en-US"/>
               <a:t>第三層</a:t>
             </a:r>
           </a:p>
           <a:p>
             <a:pPr lvl="3"/>
             <a:r>
-              <a:rPr lang="zh-TW" altLang="en-US" smtClean="0"/>
+              <a:rPr lang="zh-TW" altLang="en-US"/>
               <a:t>第四層</a:t>
             </a:r>
           </a:p>
           <a:p>
             <a:pPr lvl="4"/>
             <a:r>
-              <a:rPr lang="zh-TW" altLang="en-US" smtClean="0"/>
+              <a:rPr lang="zh-TW" altLang="en-US"/>
               <a:t>第五層</a:t>
             </a:r>
-            <a:endParaRPr lang="zh-TW" altLang="en-US"/>
           </a:p>
         </p:txBody>
       </p:sp>
@@ -3721,7 +3724,7 @@
       </p:grpSpPr>
       <p:sp>
         <p:nvSpPr>
-          <p:cNvPr id="4" name="Title 3"/>
+          <p:cNvPr id="4" name="標題 3"/>
           <p:cNvSpPr>
             <a:spLocks noGrp="1"/>
           </p:cNvSpPr>
@@ -3729,158 +3732,84 @@
             <p:ph type="title"/>
           </p:nvPr>
         </p:nvSpPr>
-        <p:spPr/>
+        <p:spPr>
+          <a:xfrm>
+            <a:off x="0" y="2660915"/>
+            <a:ext cx="12192000" cy="1143000"/>
+          </a:xfrm>
+        </p:spPr>
         <p:txBody>
           <a:bodyPr>
-            <a:normAutofit/>
+            <a:noAutofit/>
           </a:bodyPr>
           <a:lstStyle/>
           <a:p>
             <a:r>
-              <a:rPr lang="en-US" altLang="zh-CN" sz="4800" b="1" dirty="0">
+              <a:rPr lang="zh-CN" altLang="en-US" sz="5333" b="1" u="sng" dirty="0">
+                <a:solidFill>
+                  <a:srgbClr val="000066"/>
+                </a:solidFill>
+                <a:effectLst>
+                  <a:outerShdw blurRad="38100" dist="38100" dir="2700000" algn="tl">
+                    <a:srgbClr val="000000">
+                      <a:alpha val="43137"/>
+                    </a:srgbClr>
+                  </a:outerShdw>
+                </a:effectLst>
+                <a:latin typeface="微軟正黑體" pitchFamily="34" charset="-120"/>
+                <a:ea typeface="微軟正黑體" pitchFamily="34" charset="-120"/>
+              </a:rPr>
+              <a:t>宣道詩 </a:t>
+            </a:r>
+            <a:r>
+              <a:rPr lang="en-US" altLang="zh-CN" sz="5333" b="1" u="sng" dirty="0">
+                <a:solidFill>
+                  <a:srgbClr val="000066"/>
+                </a:solidFill>
+                <a:effectLst>
+                  <a:outerShdw blurRad="38100" dist="38100" dir="2700000" algn="tl">
+                    <a:srgbClr val="000000">
+                      <a:alpha val="43137"/>
+                    </a:srgbClr>
+                  </a:outerShdw>
+                </a:effectLst>
+                <a:latin typeface="微軟正黑體" pitchFamily="34" charset="-120"/>
+                <a:ea typeface="微軟正黑體" pitchFamily="34" charset="-120"/>
+              </a:rPr>
+              <a:t>234</a:t>
+            </a:r>
+            <a:br>
+              <a:rPr lang="en-US" altLang="zh-CN" sz="7200" b="1" i="1" dirty="0">
                 <a:solidFill>
                   <a:srgbClr val="660033"/>
                 </a:solidFill>
-                <a:latin typeface="Microsoft JhengHei" panose="020B0604030504040204" pitchFamily="34" charset="-120"/>
-                <a:ea typeface="Microsoft JhengHei" panose="020B0604030504040204" pitchFamily="34" charset="-120"/>
+                <a:effectLst>
+                  <a:outerShdw blurRad="38100" dist="38100" dir="2700000" algn="tl">
+                    <a:srgbClr val="000000">
+                      <a:alpha val="43137"/>
+                    </a:srgbClr>
+                  </a:outerShdw>
+                </a:effectLst>
+                <a:latin typeface="微軟正黑體" pitchFamily="34" charset="-120"/>
+                <a:ea typeface="微軟正黑體" pitchFamily="34" charset="-120"/>
               </a:rPr>
-              <a:t>【</a:t>
-            </a:r>
-            <a:r>
-              <a:rPr lang="zh-CN" altLang="en-US" sz="4800" b="1" dirty="0">
+            </a:br>
+            <a:r>
+              <a:rPr lang="zh-TW" altLang="en-US" sz="8000" b="1" dirty="0">
                 <a:solidFill>
                   <a:srgbClr val="660033"/>
                 </a:solidFill>
-                <a:latin typeface="Microsoft JhengHei" panose="020B0604030504040204" pitchFamily="34" charset="-120"/>
-                <a:ea typeface="Microsoft JhengHei" panose="020B0604030504040204" pitchFamily="34" charset="-120"/>
+                <a:effectLst>
+                  <a:outerShdw blurRad="38100" dist="38100" dir="2700000" algn="tl">
+                    <a:srgbClr val="000000">
+                      <a:alpha val="43137"/>
+                    </a:srgbClr>
+                  </a:outerShdw>
+                </a:effectLst>
+                <a:latin typeface="微軟正黑體" pitchFamily="34" charset="-120"/>
+                <a:ea typeface="微軟正黑體" pitchFamily="34" charset="-120"/>
               </a:rPr>
               <a:t>教會復興</a:t>
-            </a:r>
-            <a:r>
-              <a:rPr lang="en-US" altLang="zh-CN" sz="4800" b="1" dirty="0">
-                <a:solidFill>
-                  <a:srgbClr val="660033"/>
-                </a:solidFill>
-                <a:latin typeface="Microsoft JhengHei" panose="020B0604030504040204" pitchFamily="34" charset="-120"/>
-                <a:ea typeface="Microsoft JhengHei" panose="020B0604030504040204" pitchFamily="34" charset="-120"/>
-              </a:rPr>
-              <a:t>】</a:t>
-            </a:r>
-          </a:p>
-        </p:txBody>
-      </p:sp>
-      <p:sp>
-        <p:nvSpPr>
-          <p:cNvPr id="5" name="Content Placeholder 4"/>
-          <p:cNvSpPr>
-            <a:spLocks noGrp="1"/>
-          </p:cNvSpPr>
-          <p:nvPr>
-            <p:ph idx="1"/>
-          </p:nvPr>
-        </p:nvSpPr>
-        <p:spPr/>
-        <p:txBody>
-          <a:bodyPr>
-            <a:noAutofit/>
-          </a:bodyPr>
-          <a:lstStyle/>
-          <a:p>
-            <a:pPr marL="0" indent="0" algn="ctr">
-              <a:buNone/>
-            </a:pPr>
-            <a:r>
-              <a:rPr lang="zh-CN" altLang="zh-TW" sz="5400" b="1" dirty="0">
-                <a:solidFill>
-                  <a:srgbClr val="660033"/>
-                </a:solidFill>
-                <a:latin typeface="Microsoft JhengHei" panose="020B0604030504040204" pitchFamily="34" charset="-120"/>
-                <a:ea typeface="Microsoft JhengHei" panose="020B0604030504040204" pitchFamily="34" charset="-120"/>
-              </a:rPr>
-              <a:t>願主教會復興</a:t>
-            </a:r>
-          </a:p>
-          <a:p>
-            <a:pPr marL="0" indent="0" algn="ctr">
-              <a:buNone/>
-            </a:pPr>
-            <a:r>
-              <a:rPr lang="zh-CN" altLang="zh-TW" sz="5400" b="1" dirty="0">
-                <a:solidFill>
-                  <a:srgbClr val="660033"/>
-                </a:solidFill>
-                <a:latin typeface="Microsoft JhengHei" panose="020B0604030504040204" pitchFamily="34" charset="-120"/>
-                <a:ea typeface="Microsoft JhengHei" panose="020B0604030504040204" pitchFamily="34" charset="-120"/>
-              </a:rPr>
-              <a:t>望救主顯鴻恩</a:t>
-            </a:r>
-          </a:p>
-          <a:p>
-            <a:pPr marL="0" indent="0" algn="ctr">
-              <a:buNone/>
-            </a:pPr>
-            <a:r>
-              <a:rPr lang="zh-CN" altLang="zh-TW" sz="5400" b="1" dirty="0">
-                <a:solidFill>
-                  <a:srgbClr val="660033"/>
-                </a:solidFill>
-                <a:latin typeface="Microsoft JhengHei" panose="020B0604030504040204" pitchFamily="34" charset="-120"/>
-                <a:ea typeface="Microsoft JhengHei" panose="020B0604030504040204" pitchFamily="34" charset="-120"/>
-              </a:rPr>
-              <a:t>求主顯現能力權柄</a:t>
-            </a:r>
-          </a:p>
-          <a:p>
-            <a:pPr marL="0" indent="0" algn="ctr">
-              <a:buNone/>
-            </a:pPr>
-            <a:r>
-              <a:rPr lang="zh-CN" altLang="zh-TW" sz="5400" b="1" dirty="0">
-                <a:solidFill>
-                  <a:srgbClr val="660033"/>
-                </a:solidFill>
-                <a:latin typeface="Microsoft JhengHei" panose="020B0604030504040204" pitchFamily="34" charset="-120"/>
-                <a:ea typeface="Microsoft JhengHei" panose="020B0604030504040204" pitchFamily="34" charset="-120"/>
-              </a:rPr>
-              <a:t>使各位聽主聲</a:t>
-            </a:r>
-          </a:p>
-        </p:txBody>
-      </p:sp>
-      <p:sp>
-        <p:nvSpPr>
-          <p:cNvPr id="6" name="Text Box 1"/>
-          <p:cNvSpPr txBox="1"/>
-          <p:nvPr/>
-        </p:nvSpPr>
-        <p:spPr>
-          <a:xfrm>
-            <a:off x="1631504" y="1700808"/>
-            <a:ext cx="1055440" cy="923330"/>
-          </a:xfrm>
-          <a:prstGeom prst="rect">
-            <a:avLst/>
-          </a:prstGeom>
-          <a:noFill/>
-          <a:ln w="9525">
-            <a:noFill/>
-            <a:miter lim="800000"/>
-          </a:ln>
-        </p:spPr>
-        <p:txBody>
-          <a:bodyPr wrap="square">
-            <a:spAutoFit/>
-          </a:bodyPr>
-          <a:lstStyle/>
-          <a:p>
-            <a:pPr algn="ctr"/>
-            <a:r>
-              <a:rPr lang="en-US" sz="5400" b="1" dirty="0">
-                <a:solidFill>
-                  <a:srgbClr val="660033"/>
-                </a:solidFill>
-              </a:rPr>
-              <a:t>1.</a:t>
             </a:r>
           </a:p>
         </p:txBody>
@@ -3888,7 +3817,7 @@
     </p:spTree>
     <p:extLst>
       <p:ext uri="{BB962C8B-B14F-4D97-AF65-F5344CB8AC3E}">
-        <p14:creationId xmlns:p14="http://schemas.microsoft.com/office/powerpoint/2010/main" val="394092367"/>
+        <p14:creationId xmlns:p14="http://schemas.microsoft.com/office/powerpoint/2010/main" val="3724263107"/>
       </p:ext>
     </p:extLst>
   </p:cSld>
@@ -3917,179 +3846,101 @@
       </p:grpSpPr>
       <p:sp>
         <p:nvSpPr>
-          <p:cNvPr id="4" name="Title 3"/>
-          <p:cNvSpPr>
-            <a:spLocks noGrp="1"/>
-          </p:cNvSpPr>
-          <p:nvPr>
-            <p:ph type="title"/>
-          </p:nvPr>
-        </p:nvSpPr>
-        <p:spPr/>
-        <p:txBody>
-          <a:bodyPr>
+          <p:cNvPr id="5" name="內容版面配置區 4"/>
+          <p:cNvSpPr>
+            <a:spLocks noGrp="1"/>
+          </p:cNvSpPr>
+          <p:nvPr>
+            <p:ph idx="1"/>
+          </p:nvPr>
+        </p:nvSpPr>
+        <p:spPr>
+          <a:xfrm>
+            <a:off x="0" y="2084851"/>
+            <a:ext cx="12192000" cy="2404863"/>
+          </a:xfrm>
+        </p:spPr>
+        <p:txBody>
+          <a:bodyPr anchor="ctr">
             <a:normAutofit/>
           </a:bodyPr>
           <a:lstStyle/>
           <a:p>
-            <a:r>
-              <a:rPr lang="en-US" altLang="zh-CN" sz="4800" b="1" dirty="0">
+            <a:pPr marL="0" indent="0" algn="ctr">
+              <a:buNone/>
+            </a:pPr>
+            <a:r>
+              <a:rPr lang="zh-TW" altLang="en-US" sz="6400" b="1" dirty="0">
                 <a:solidFill>
                   <a:srgbClr val="660033"/>
                 </a:solidFill>
-                <a:latin typeface="Microsoft JhengHei" panose="020B0604030504040204" pitchFamily="34" charset="-120"/>
-                <a:ea typeface="Microsoft JhengHei" panose="020B0604030504040204" pitchFamily="34" charset="-120"/>
+                <a:latin typeface="Microsoft JhengHei" pitchFamily="34" charset="-120"/>
+                <a:ea typeface="Microsoft JhengHei" pitchFamily="34" charset="-120"/>
               </a:rPr>
-              <a:t>【</a:t>
-            </a:r>
-            <a:r>
-              <a:rPr lang="zh-CN" altLang="en-US" sz="4800" b="1" dirty="0">
+              <a:t>願主教會復興  望救主顯鴻恩</a:t>
+            </a:r>
+            <a:endParaRPr lang="en-US" altLang="zh-TW" sz="6400" b="1" dirty="0">
+              <a:solidFill>
+                <a:srgbClr val="660033"/>
+              </a:solidFill>
+              <a:latin typeface="Microsoft JhengHei" pitchFamily="34" charset="-120"/>
+              <a:ea typeface="Microsoft JhengHei" pitchFamily="34" charset="-120"/>
+            </a:endParaRPr>
+          </a:p>
+          <a:p>
+            <a:pPr marL="0" indent="0" algn="ctr">
+              <a:buNone/>
+            </a:pPr>
+            <a:r>
+              <a:rPr lang="zh-TW" altLang="en-US" sz="6400" b="1" dirty="0">
                 <a:solidFill>
                   <a:srgbClr val="660033"/>
                 </a:solidFill>
-                <a:latin typeface="Microsoft JhengHei" panose="020B0604030504040204" pitchFamily="34" charset="-120"/>
-                <a:ea typeface="Microsoft JhengHei" panose="020B0604030504040204" pitchFamily="34" charset="-120"/>
+                <a:latin typeface="Microsoft JhengHei" pitchFamily="34" charset="-120"/>
+                <a:ea typeface="Microsoft JhengHei" pitchFamily="34" charset="-120"/>
               </a:rPr>
-              <a:t>教會復興</a:t>
-            </a:r>
-            <a:r>
-              <a:rPr lang="en-US" altLang="zh-CN" sz="4800" b="1" dirty="0">
-                <a:solidFill>
-                  <a:srgbClr val="660033"/>
-                </a:solidFill>
-                <a:latin typeface="Microsoft JhengHei" panose="020B0604030504040204" pitchFamily="34" charset="-120"/>
-                <a:ea typeface="Microsoft JhengHei" panose="020B0604030504040204" pitchFamily="34" charset="-120"/>
-              </a:rPr>
-              <a:t>】</a:t>
-            </a:r>
-          </a:p>
-        </p:txBody>
-      </p:sp>
-      <p:sp>
-        <p:nvSpPr>
-          <p:cNvPr id="5" name="Content Placeholder 4"/>
-          <p:cNvSpPr>
-            <a:spLocks noGrp="1"/>
-          </p:cNvSpPr>
-          <p:nvPr>
-            <p:ph idx="1"/>
-          </p:nvPr>
-        </p:nvSpPr>
-        <p:spPr/>
-        <p:txBody>
-          <a:bodyPr>
-            <a:noAutofit/>
-          </a:bodyPr>
-          <a:lstStyle/>
-          <a:p>
-            <a:pPr marL="0" indent="0" algn="ctr">
-              <a:buNone/>
-            </a:pPr>
-            <a:r>
-              <a:rPr lang="zh-CN" altLang="zh-TW" sz="5400" b="1" dirty="0">
-                <a:solidFill>
-                  <a:srgbClr val="660033"/>
-                </a:solidFill>
-                <a:latin typeface="Microsoft JhengHei" panose="020B0604030504040204" pitchFamily="34" charset="-120"/>
-                <a:ea typeface="Microsoft JhengHei" panose="020B0604030504040204" pitchFamily="34" charset="-120"/>
-              </a:rPr>
-              <a:t>願主教會復興</a:t>
-            </a:r>
-          </a:p>
-          <a:p>
-            <a:pPr marL="0" indent="0" algn="ctr">
-              <a:buNone/>
-            </a:pPr>
-            <a:r>
-              <a:rPr lang="zh-CN" altLang="zh-TW" sz="5400" b="1" dirty="0">
-                <a:solidFill>
-                  <a:srgbClr val="660033"/>
-                </a:solidFill>
-                <a:latin typeface="Microsoft JhengHei" panose="020B0604030504040204" pitchFamily="34" charset="-120"/>
-                <a:ea typeface="Microsoft JhengHei" panose="020B0604030504040204" pitchFamily="34" charset="-120"/>
-              </a:rPr>
-              <a:t>大家同讚主名</a:t>
-            </a:r>
-          </a:p>
-          <a:p>
-            <a:pPr marL="0" indent="0" algn="ctr">
-              <a:buNone/>
-            </a:pPr>
-            <a:r>
-              <a:rPr lang="zh-CN" altLang="zh-TW" sz="5400" b="1" dirty="0">
-                <a:solidFill>
-                  <a:srgbClr val="660033"/>
-                </a:solidFill>
-                <a:latin typeface="Microsoft JhengHei" panose="020B0604030504040204" pitchFamily="34" charset="-120"/>
-                <a:ea typeface="Microsoft JhengHei" panose="020B0604030504040204" pitchFamily="34" charset="-120"/>
-              </a:rPr>
-              <a:t>懇求聖靈顯彰大能</a:t>
-            </a:r>
-          </a:p>
-          <a:p>
-            <a:pPr marL="0" indent="0" algn="ctr">
-              <a:buNone/>
-            </a:pPr>
-            <a:r>
-              <a:rPr lang="zh-CN" altLang="zh-TW" sz="5400" b="1" dirty="0">
-                <a:solidFill>
-                  <a:srgbClr val="660033"/>
-                </a:solidFill>
-                <a:latin typeface="Microsoft JhengHei" panose="020B0604030504040204" pitchFamily="34" charset="-120"/>
-                <a:ea typeface="Microsoft JhengHei" panose="020B0604030504040204" pitchFamily="34" charset="-120"/>
-              </a:rPr>
-              <a:t>一同變為新人</a:t>
-            </a:r>
-          </a:p>
-        </p:txBody>
-      </p:sp>
-      <p:sp>
-        <p:nvSpPr>
-          <p:cNvPr id="6" name="Text Box 1"/>
+              <a:t>求主顯現能力權柄  使各位聽主聲</a:t>
+            </a:r>
+          </a:p>
+        </p:txBody>
+      </p:sp>
+      <p:sp>
+        <p:nvSpPr>
+          <p:cNvPr id="3" name="TextBox 2"/>
           <p:cNvSpPr txBox="1"/>
           <p:nvPr/>
         </p:nvSpPr>
         <p:spPr>
           <a:xfrm>
-            <a:off x="1631504" y="1700808"/>
-            <a:ext cx="1055440" cy="923330"/>
+            <a:off x="0" y="5061182"/>
+            <a:ext cx="12192000" cy="646331"/>
           </a:xfrm>
           <a:prstGeom prst="rect">
             <a:avLst/>
           </a:prstGeom>
           <a:noFill/>
-          <a:ln w="9525">
-            <a:noFill/>
-            <a:miter lim="800000"/>
-          </a:ln>
         </p:spPr>
         <p:txBody>
-          <a:bodyPr wrap="square">
+          <a:bodyPr wrap="square" rtlCol="0">
             <a:spAutoFit/>
           </a:bodyPr>
           <a:lstStyle/>
           <a:p>
             <a:pPr algn="ctr"/>
             <a:r>
-              <a:rPr lang="en-US" sz="5400" b="1" dirty="0">
+              <a:rPr lang="en-US" sz="3600" b="1" dirty="0">
                 <a:solidFill>
                   <a:srgbClr val="660033"/>
                 </a:solidFill>
+                <a:latin typeface="+mj-lt"/>
               </a:rPr>
-              <a:t>2</a:t>
-            </a:r>
-            <a:r>
-              <a:rPr lang="en-US" sz="5400" b="1" dirty="0" smtClean="0">
-                <a:solidFill>
-                  <a:srgbClr val="660033"/>
-                </a:solidFill>
-              </a:rPr>
-              <a:t>.</a:t>
-            </a:r>
-            <a:endParaRPr lang="en-US" sz="5400" b="1" dirty="0">
+              <a:t>( 1 / 5 )</a:t>
+            </a:r>
+            <a:endParaRPr lang="vi-VN" sz="3600" b="1" dirty="0">
               <a:solidFill>
                 <a:srgbClr val="660033"/>
               </a:solidFill>
+              <a:latin typeface="+mj-lt"/>
             </a:endParaRPr>
           </a:p>
         </p:txBody>
@@ -4097,7 +3948,7 @@
     </p:spTree>
     <p:extLst>
       <p:ext uri="{BB962C8B-B14F-4D97-AF65-F5344CB8AC3E}">
-        <p14:creationId xmlns:p14="http://schemas.microsoft.com/office/powerpoint/2010/main" val="543475288"/>
+        <p14:creationId xmlns:p14="http://schemas.microsoft.com/office/powerpoint/2010/main" val="1407003638"/>
       </p:ext>
     </p:extLst>
   </p:cSld>
@@ -4112,7 +3963,13 @@
   <p:cSld>
     <p:spTree>
       <p:nvGrpSpPr>
-        <p:cNvPr id="1" name=""/>
+        <p:cNvPr id="1" name="">
+          <a:extLst>
+            <a:ext uri="{FF2B5EF4-FFF2-40B4-BE49-F238E27FC236}">
+              <a16:creationId xmlns:a16="http://schemas.microsoft.com/office/drawing/2014/main" id="{EDD31896-B038-962A-1D17-25E545FA765F}"/>
+            </a:ext>
+          </a:extLst>
+        </p:cNvPr>
         <p:cNvGrpSpPr/>
         <p:nvPr/>
       </p:nvGrpSpPr>
@@ -4126,179 +3983,106 @@
       </p:grpSpPr>
       <p:sp>
         <p:nvSpPr>
-          <p:cNvPr id="4" name="Title 3"/>
-          <p:cNvSpPr>
-            <a:spLocks noGrp="1"/>
-          </p:cNvSpPr>
-          <p:nvPr>
-            <p:ph type="title"/>
-          </p:nvPr>
-        </p:nvSpPr>
-        <p:spPr/>
-        <p:txBody>
-          <a:bodyPr>
+          <p:cNvPr id="5" name="內容版面配置區 4">
+            <a:extLst>
+              <a:ext uri="{FF2B5EF4-FFF2-40B4-BE49-F238E27FC236}">
+                <a16:creationId xmlns:a16="http://schemas.microsoft.com/office/drawing/2014/main" id="{F5565DD8-857B-F237-97B2-1E36AE0566B4}"/>
+              </a:ext>
+            </a:extLst>
+          </p:cNvPr>
+          <p:cNvSpPr>
+            <a:spLocks noGrp="1"/>
+          </p:cNvSpPr>
+          <p:nvPr>
+            <p:ph idx="1"/>
+          </p:nvPr>
+        </p:nvSpPr>
+        <p:spPr>
+          <a:xfrm>
+            <a:off x="0" y="2084851"/>
+            <a:ext cx="12192000" cy="2404863"/>
+          </a:xfrm>
+        </p:spPr>
+        <p:txBody>
+          <a:bodyPr anchor="ctr">
             <a:normAutofit/>
           </a:bodyPr>
           <a:lstStyle/>
           <a:p>
-            <a:r>
-              <a:rPr lang="en-US" altLang="zh-CN" sz="4800" b="1" dirty="0">
+            <a:pPr marL="0" indent="0" algn="ctr">
+              <a:buNone/>
+            </a:pPr>
+            <a:r>
+              <a:rPr lang="zh-TW" altLang="en-US" sz="6400" b="1" dirty="0">
                 <a:solidFill>
                   <a:srgbClr val="660033"/>
                 </a:solidFill>
-                <a:latin typeface="Microsoft JhengHei" panose="020B0604030504040204" pitchFamily="34" charset="-120"/>
-                <a:ea typeface="Microsoft JhengHei" panose="020B0604030504040204" pitchFamily="34" charset="-120"/>
+                <a:latin typeface="Microsoft JhengHei" pitchFamily="34" charset="-120"/>
+                <a:ea typeface="Microsoft JhengHei" pitchFamily="34" charset="-120"/>
               </a:rPr>
-              <a:t>【</a:t>
-            </a:r>
-            <a:r>
-              <a:rPr lang="zh-CN" altLang="en-US" sz="4800" b="1" dirty="0">
+              <a:t>願主教會復興  大家同讚主名</a:t>
+            </a:r>
+          </a:p>
+          <a:p>
+            <a:pPr marL="0" indent="0" algn="ctr">
+              <a:buNone/>
+            </a:pPr>
+            <a:r>
+              <a:rPr lang="zh-TW" altLang="en-US" sz="6400" b="1" dirty="0">
                 <a:solidFill>
                   <a:srgbClr val="660033"/>
                 </a:solidFill>
-                <a:latin typeface="Microsoft JhengHei" panose="020B0604030504040204" pitchFamily="34" charset="-120"/>
-                <a:ea typeface="Microsoft JhengHei" panose="020B0604030504040204" pitchFamily="34" charset="-120"/>
+                <a:latin typeface="Microsoft JhengHei" pitchFamily="34" charset="-120"/>
+                <a:ea typeface="Microsoft JhengHei" pitchFamily="34" charset="-120"/>
               </a:rPr>
-              <a:t>教會復興</a:t>
-            </a:r>
-            <a:r>
-              <a:rPr lang="en-US" altLang="zh-CN" sz="4800" b="1" dirty="0">
-                <a:solidFill>
-                  <a:srgbClr val="660033"/>
-                </a:solidFill>
-                <a:latin typeface="Microsoft JhengHei" panose="020B0604030504040204" pitchFamily="34" charset="-120"/>
-                <a:ea typeface="Microsoft JhengHei" panose="020B0604030504040204" pitchFamily="34" charset="-120"/>
-              </a:rPr>
-              <a:t>】</a:t>
-            </a:r>
-          </a:p>
-        </p:txBody>
-      </p:sp>
-      <p:sp>
-        <p:nvSpPr>
-          <p:cNvPr id="5" name="Content Placeholder 4"/>
-          <p:cNvSpPr>
-            <a:spLocks noGrp="1"/>
-          </p:cNvSpPr>
-          <p:nvPr>
-            <p:ph idx="1"/>
-          </p:nvPr>
-        </p:nvSpPr>
-        <p:spPr/>
-        <p:txBody>
-          <a:bodyPr>
-            <a:noAutofit/>
-          </a:bodyPr>
-          <a:lstStyle/>
-          <a:p>
-            <a:pPr marL="0" indent="0" algn="ctr">
-              <a:buNone/>
-            </a:pPr>
-            <a:r>
-              <a:rPr lang="zh-CN" altLang="zh-TW" sz="5400" b="1" dirty="0">
-                <a:solidFill>
-                  <a:srgbClr val="660033"/>
-                </a:solidFill>
-                <a:latin typeface="Microsoft JhengHei" panose="020B0604030504040204" pitchFamily="34" charset="-120"/>
-                <a:ea typeface="Microsoft JhengHei" panose="020B0604030504040204" pitchFamily="34" charset="-120"/>
-              </a:rPr>
-              <a:t>願主教會復興</a:t>
-            </a:r>
-          </a:p>
-          <a:p>
-            <a:pPr marL="0" indent="0" algn="ctr">
-              <a:buNone/>
-            </a:pPr>
-            <a:r>
-              <a:rPr lang="zh-CN" altLang="zh-TW" sz="5400" b="1" dirty="0">
-                <a:solidFill>
-                  <a:srgbClr val="660033"/>
-                </a:solidFill>
-                <a:latin typeface="Microsoft JhengHei" panose="020B0604030504040204" pitchFamily="34" charset="-120"/>
-                <a:ea typeface="Microsoft JhengHei" panose="020B0604030504040204" pitchFamily="34" charset="-120"/>
-              </a:rPr>
-              <a:t>頌揚救主聖名</a:t>
-            </a:r>
-          </a:p>
-          <a:p>
-            <a:pPr marL="0" indent="0" algn="ctr">
-              <a:buNone/>
-            </a:pPr>
-            <a:r>
-              <a:rPr lang="zh-CN" altLang="zh-TW" sz="5400" b="1" dirty="0">
-                <a:solidFill>
-                  <a:srgbClr val="660033"/>
-                </a:solidFill>
-                <a:latin typeface="Microsoft JhengHei" panose="020B0604030504040204" pitchFamily="34" charset="-120"/>
-                <a:ea typeface="Microsoft JhengHei" panose="020B0604030504040204" pitchFamily="34" charset="-120"/>
-              </a:rPr>
-              <a:t>望主慈愛感動各人</a:t>
-            </a:r>
-          </a:p>
-          <a:p>
-            <a:pPr marL="0" indent="0" algn="ctr">
-              <a:buNone/>
-            </a:pPr>
-            <a:r>
-              <a:rPr lang="zh-CN" altLang="zh-TW" sz="5400" b="1" dirty="0">
-                <a:solidFill>
-                  <a:srgbClr val="660033"/>
-                </a:solidFill>
-                <a:latin typeface="Microsoft JhengHei" panose="020B0604030504040204" pitchFamily="34" charset="-120"/>
-                <a:ea typeface="Microsoft JhengHei" panose="020B0604030504040204" pitchFamily="34" charset="-120"/>
-              </a:rPr>
-              <a:t>激發愛主熱心</a:t>
-            </a:r>
-          </a:p>
-        </p:txBody>
-      </p:sp>
-      <p:sp>
-        <p:nvSpPr>
-          <p:cNvPr id="6" name="Text Box 1"/>
+              <a:t>懇求聖靈顯彰大能  一同變為新人</a:t>
+            </a:r>
+          </a:p>
+        </p:txBody>
+      </p:sp>
+      <p:sp>
+        <p:nvSpPr>
+          <p:cNvPr id="3" name="TextBox 2">
+            <a:extLst>
+              <a:ext uri="{FF2B5EF4-FFF2-40B4-BE49-F238E27FC236}">
+                <a16:creationId xmlns:a16="http://schemas.microsoft.com/office/drawing/2014/main" id="{057FEFA2-322B-CADF-1FBE-DDC30FE6F43E}"/>
+              </a:ext>
+            </a:extLst>
+          </p:cNvPr>
           <p:cNvSpPr txBox="1"/>
           <p:nvPr/>
         </p:nvSpPr>
         <p:spPr>
           <a:xfrm>
-            <a:off x="1631504" y="1700808"/>
-            <a:ext cx="1055440" cy="923330"/>
+            <a:off x="0" y="5061182"/>
+            <a:ext cx="12192000" cy="646331"/>
           </a:xfrm>
           <a:prstGeom prst="rect">
             <a:avLst/>
           </a:prstGeom>
           <a:noFill/>
-          <a:ln w="9525">
-            <a:noFill/>
-            <a:miter lim="800000"/>
-          </a:ln>
         </p:spPr>
         <p:txBody>
-          <a:bodyPr wrap="square">
+          <a:bodyPr wrap="square" rtlCol="0">
             <a:spAutoFit/>
           </a:bodyPr>
           <a:lstStyle/>
           <a:p>
             <a:pPr algn="ctr"/>
             <a:r>
-              <a:rPr lang="en-US" sz="5400" b="1" dirty="0">
+              <a:rPr lang="en-US" sz="3600" b="1" dirty="0">
                 <a:solidFill>
                   <a:srgbClr val="660033"/>
                 </a:solidFill>
+                <a:latin typeface="+mj-lt"/>
               </a:rPr>
-              <a:t>3</a:t>
-            </a:r>
-            <a:r>
-              <a:rPr lang="en-US" sz="5400" b="1" dirty="0" smtClean="0">
-                <a:solidFill>
-                  <a:srgbClr val="660033"/>
-                </a:solidFill>
-              </a:rPr>
-              <a:t>.</a:t>
-            </a:r>
-            <a:endParaRPr lang="en-US" sz="5400" b="1" dirty="0">
+              <a:t>( 2 / 5 )</a:t>
+            </a:r>
+            <a:endParaRPr lang="vi-VN" sz="3600" b="1" dirty="0">
               <a:solidFill>
                 <a:srgbClr val="660033"/>
               </a:solidFill>
+              <a:latin typeface="+mj-lt"/>
             </a:endParaRPr>
           </a:p>
         </p:txBody>
@@ -4306,7 +4090,7 @@
     </p:spTree>
     <p:extLst>
       <p:ext uri="{BB962C8B-B14F-4D97-AF65-F5344CB8AC3E}">
-        <p14:creationId xmlns:p14="http://schemas.microsoft.com/office/powerpoint/2010/main" val="3566709367"/>
+        <p14:creationId xmlns:p14="http://schemas.microsoft.com/office/powerpoint/2010/main" val="144108791"/>
       </p:ext>
     </p:extLst>
   </p:cSld>
@@ -4321,7 +4105,13 @@
   <p:cSld>
     <p:spTree>
       <p:nvGrpSpPr>
-        <p:cNvPr id="1" name=""/>
+        <p:cNvPr id="1" name="">
+          <a:extLst>
+            <a:ext uri="{FF2B5EF4-FFF2-40B4-BE49-F238E27FC236}">
+              <a16:creationId xmlns:a16="http://schemas.microsoft.com/office/drawing/2014/main" id="{07AE8474-4B80-5D8F-8CAD-2373E4E1D00B}"/>
+            </a:ext>
+          </a:extLst>
+        </p:cNvPr>
         <p:cNvGrpSpPr/>
         <p:nvPr/>
       </p:nvGrpSpPr>
@@ -4335,179 +4125,106 @@
       </p:grpSpPr>
       <p:sp>
         <p:nvSpPr>
-          <p:cNvPr id="4" name="Title 3"/>
-          <p:cNvSpPr>
-            <a:spLocks noGrp="1"/>
-          </p:cNvSpPr>
-          <p:nvPr>
-            <p:ph type="title"/>
-          </p:nvPr>
-        </p:nvSpPr>
-        <p:spPr/>
-        <p:txBody>
-          <a:bodyPr>
+          <p:cNvPr id="5" name="內容版面配置區 4">
+            <a:extLst>
+              <a:ext uri="{FF2B5EF4-FFF2-40B4-BE49-F238E27FC236}">
+                <a16:creationId xmlns:a16="http://schemas.microsoft.com/office/drawing/2014/main" id="{AD6B170F-DBD0-666C-2192-AAB1FAB3C205}"/>
+              </a:ext>
+            </a:extLst>
+          </p:cNvPr>
+          <p:cNvSpPr>
+            <a:spLocks noGrp="1"/>
+          </p:cNvSpPr>
+          <p:nvPr>
+            <p:ph idx="1"/>
+          </p:nvPr>
+        </p:nvSpPr>
+        <p:spPr>
+          <a:xfrm>
+            <a:off x="0" y="2084851"/>
+            <a:ext cx="12192000" cy="2404863"/>
+          </a:xfrm>
+        </p:spPr>
+        <p:txBody>
+          <a:bodyPr anchor="ctr">
             <a:normAutofit/>
           </a:bodyPr>
           <a:lstStyle/>
           <a:p>
-            <a:r>
-              <a:rPr lang="en-US" altLang="zh-CN" sz="4800" b="1" dirty="0">
+            <a:pPr marL="0" indent="0" algn="ctr">
+              <a:buNone/>
+            </a:pPr>
+            <a:r>
+              <a:rPr lang="zh-TW" altLang="en-US" sz="6400" b="1" dirty="0">
                 <a:solidFill>
                   <a:srgbClr val="660033"/>
                 </a:solidFill>
-                <a:latin typeface="Microsoft JhengHei" panose="020B0604030504040204" pitchFamily="34" charset="-120"/>
-                <a:ea typeface="Microsoft JhengHei" panose="020B0604030504040204" pitchFamily="34" charset="-120"/>
+                <a:latin typeface="Microsoft JhengHei" pitchFamily="34" charset="-120"/>
+                <a:ea typeface="Microsoft JhengHei" pitchFamily="34" charset="-120"/>
               </a:rPr>
-              <a:t>【</a:t>
-            </a:r>
-            <a:r>
-              <a:rPr lang="zh-CN" altLang="en-US" sz="4800" b="1" dirty="0">
+              <a:t>願主教會復興  頌揚救主聖名</a:t>
+            </a:r>
+          </a:p>
+          <a:p>
+            <a:pPr marL="0" indent="0" algn="ctr">
+              <a:buNone/>
+            </a:pPr>
+            <a:r>
+              <a:rPr lang="zh-TW" altLang="en-US" sz="6400" b="1" dirty="0">
                 <a:solidFill>
                   <a:srgbClr val="660033"/>
                 </a:solidFill>
-                <a:latin typeface="Microsoft JhengHei" panose="020B0604030504040204" pitchFamily="34" charset="-120"/>
-                <a:ea typeface="Microsoft JhengHei" panose="020B0604030504040204" pitchFamily="34" charset="-120"/>
+                <a:latin typeface="Microsoft JhengHei" pitchFamily="34" charset="-120"/>
+                <a:ea typeface="Microsoft JhengHei" pitchFamily="34" charset="-120"/>
               </a:rPr>
-              <a:t>教會復興</a:t>
-            </a:r>
-            <a:r>
-              <a:rPr lang="en-US" altLang="zh-CN" sz="4800" b="1" dirty="0">
-                <a:solidFill>
-                  <a:srgbClr val="660033"/>
-                </a:solidFill>
-                <a:latin typeface="Microsoft JhengHei" panose="020B0604030504040204" pitchFamily="34" charset="-120"/>
-                <a:ea typeface="Microsoft JhengHei" panose="020B0604030504040204" pitchFamily="34" charset="-120"/>
-              </a:rPr>
-              <a:t>】</a:t>
-            </a:r>
-          </a:p>
-        </p:txBody>
-      </p:sp>
-      <p:sp>
-        <p:nvSpPr>
-          <p:cNvPr id="5" name="Content Placeholder 4"/>
-          <p:cNvSpPr>
-            <a:spLocks noGrp="1"/>
-          </p:cNvSpPr>
-          <p:nvPr>
-            <p:ph idx="1"/>
-          </p:nvPr>
-        </p:nvSpPr>
-        <p:spPr/>
-        <p:txBody>
-          <a:bodyPr>
-            <a:noAutofit/>
-          </a:bodyPr>
-          <a:lstStyle/>
-          <a:p>
-            <a:pPr marL="0" indent="0" algn="ctr">
-              <a:buNone/>
-            </a:pPr>
-            <a:r>
-              <a:rPr lang="zh-CN" altLang="zh-TW" sz="5400" b="1" dirty="0">
-                <a:solidFill>
-                  <a:srgbClr val="660033"/>
-                </a:solidFill>
-                <a:latin typeface="Microsoft JhengHei" panose="020B0604030504040204" pitchFamily="34" charset="-120"/>
-                <a:ea typeface="Microsoft JhengHei" panose="020B0604030504040204" pitchFamily="34" charset="-120"/>
-              </a:rPr>
-              <a:t>願主教會復興</a:t>
-            </a:r>
-          </a:p>
-          <a:p>
-            <a:pPr marL="0" indent="0" algn="ctr">
-              <a:buNone/>
-            </a:pPr>
-            <a:r>
-              <a:rPr lang="zh-CN" altLang="zh-TW" sz="5400" b="1" dirty="0">
-                <a:solidFill>
-                  <a:srgbClr val="660033"/>
-                </a:solidFill>
-                <a:latin typeface="Microsoft JhengHei" panose="020B0604030504040204" pitchFamily="34" charset="-120"/>
-                <a:ea typeface="Microsoft JhengHei" panose="020B0604030504040204" pitchFamily="34" charset="-120"/>
-              </a:rPr>
-              <a:t>靈糧賜給各人</a:t>
-            </a:r>
-          </a:p>
-          <a:p>
-            <a:pPr marL="0" indent="0" algn="ctr">
-              <a:buNone/>
-            </a:pPr>
-            <a:r>
-              <a:rPr lang="zh-CN" altLang="zh-TW" sz="5400" b="1" dirty="0">
-                <a:solidFill>
-                  <a:srgbClr val="660033"/>
-                </a:solidFill>
-                <a:latin typeface="Microsoft JhengHei" panose="020B0604030504040204" pitchFamily="34" charset="-120"/>
-                <a:ea typeface="Microsoft JhengHei" panose="020B0604030504040204" pitchFamily="34" charset="-120"/>
-              </a:rPr>
-              <a:t>將主言語永存在心</a:t>
-            </a:r>
-          </a:p>
-          <a:p>
-            <a:pPr marL="0" indent="0" algn="ctr">
-              <a:buNone/>
-            </a:pPr>
-            <a:r>
-              <a:rPr lang="zh-CN" altLang="zh-TW" sz="5400" b="1" dirty="0">
-                <a:solidFill>
-                  <a:srgbClr val="660033"/>
-                </a:solidFill>
-                <a:latin typeface="Microsoft JhengHei" panose="020B0604030504040204" pitchFamily="34" charset="-120"/>
-                <a:ea typeface="Microsoft JhengHei" panose="020B0604030504040204" pitchFamily="34" charset="-120"/>
-              </a:rPr>
-              <a:t>靠主得新生命</a:t>
-            </a:r>
-          </a:p>
-        </p:txBody>
-      </p:sp>
-      <p:sp>
-        <p:nvSpPr>
-          <p:cNvPr id="6" name="Text Box 1"/>
+              <a:t>望主慈愛感動各人  激發愛主熱心</a:t>
+            </a:r>
+          </a:p>
+        </p:txBody>
+      </p:sp>
+      <p:sp>
+        <p:nvSpPr>
+          <p:cNvPr id="3" name="TextBox 2">
+            <a:extLst>
+              <a:ext uri="{FF2B5EF4-FFF2-40B4-BE49-F238E27FC236}">
+                <a16:creationId xmlns:a16="http://schemas.microsoft.com/office/drawing/2014/main" id="{EF35BA11-B53D-17D0-8AB0-49E0F965F7B9}"/>
+              </a:ext>
+            </a:extLst>
+          </p:cNvPr>
           <p:cNvSpPr txBox="1"/>
           <p:nvPr/>
         </p:nvSpPr>
         <p:spPr>
           <a:xfrm>
-            <a:off x="1631504" y="1700808"/>
-            <a:ext cx="1055440" cy="923330"/>
+            <a:off x="0" y="5061182"/>
+            <a:ext cx="12192000" cy="646331"/>
           </a:xfrm>
           <a:prstGeom prst="rect">
             <a:avLst/>
           </a:prstGeom>
           <a:noFill/>
-          <a:ln w="9525">
-            <a:noFill/>
-            <a:miter lim="800000"/>
-          </a:ln>
         </p:spPr>
         <p:txBody>
-          <a:bodyPr wrap="square">
+          <a:bodyPr wrap="square" rtlCol="0">
             <a:spAutoFit/>
           </a:bodyPr>
           <a:lstStyle/>
           <a:p>
             <a:pPr algn="ctr"/>
             <a:r>
-              <a:rPr lang="en-US" sz="5400" b="1" dirty="0">
+              <a:rPr lang="en-US" sz="3600" b="1" dirty="0">
                 <a:solidFill>
                   <a:srgbClr val="660033"/>
                 </a:solidFill>
+                <a:latin typeface="+mj-lt"/>
               </a:rPr>
-              <a:t>4</a:t>
-            </a:r>
-            <a:r>
-              <a:rPr lang="en-US" sz="5400" b="1" dirty="0" smtClean="0">
-                <a:solidFill>
-                  <a:srgbClr val="660033"/>
-                </a:solidFill>
-              </a:rPr>
-              <a:t>.</a:t>
-            </a:r>
-            <a:endParaRPr lang="en-US" sz="5400" b="1" dirty="0">
+              <a:t>( 3 / 5 )</a:t>
+            </a:r>
+            <a:endParaRPr lang="vi-VN" sz="3600" b="1" dirty="0">
               <a:solidFill>
                 <a:srgbClr val="660033"/>
               </a:solidFill>
+              <a:latin typeface="+mj-lt"/>
             </a:endParaRPr>
           </a:p>
         </p:txBody>
@@ -4515,7 +4232,7 @@
     </p:spTree>
     <p:extLst>
       <p:ext uri="{BB962C8B-B14F-4D97-AF65-F5344CB8AC3E}">
-        <p14:creationId xmlns:p14="http://schemas.microsoft.com/office/powerpoint/2010/main" val="369811398"/>
+        <p14:creationId xmlns:p14="http://schemas.microsoft.com/office/powerpoint/2010/main" val="959787904"/>
       </p:ext>
     </p:extLst>
   </p:cSld>
@@ -4530,7 +4247,13 @@
   <p:cSld>
     <p:spTree>
       <p:nvGrpSpPr>
-        <p:cNvPr id="1" name=""/>
+        <p:cNvPr id="1" name="">
+          <a:extLst>
+            <a:ext uri="{FF2B5EF4-FFF2-40B4-BE49-F238E27FC236}">
+              <a16:creationId xmlns:a16="http://schemas.microsoft.com/office/drawing/2014/main" id="{B360541E-B41A-7ECC-B808-B6691632C89B}"/>
+            </a:ext>
+          </a:extLst>
+        </p:cNvPr>
         <p:cNvGrpSpPr/>
         <p:nvPr/>
       </p:nvGrpSpPr>
@@ -4544,179 +4267,248 @@
       </p:grpSpPr>
       <p:sp>
         <p:nvSpPr>
-          <p:cNvPr id="4" name="Title 3"/>
-          <p:cNvSpPr>
-            <a:spLocks noGrp="1"/>
-          </p:cNvSpPr>
-          <p:nvPr>
-            <p:ph type="title"/>
-          </p:nvPr>
-        </p:nvSpPr>
-        <p:spPr/>
-        <p:txBody>
-          <a:bodyPr>
+          <p:cNvPr id="5" name="內容版面配置區 4">
+            <a:extLst>
+              <a:ext uri="{FF2B5EF4-FFF2-40B4-BE49-F238E27FC236}">
+                <a16:creationId xmlns:a16="http://schemas.microsoft.com/office/drawing/2014/main" id="{77F39721-C117-93FA-1E26-BE6434DB7CF9}"/>
+              </a:ext>
+            </a:extLst>
+          </p:cNvPr>
+          <p:cNvSpPr>
+            <a:spLocks noGrp="1"/>
+          </p:cNvSpPr>
+          <p:nvPr>
+            <p:ph idx="1"/>
+          </p:nvPr>
+        </p:nvSpPr>
+        <p:spPr>
+          <a:xfrm>
+            <a:off x="0" y="2084851"/>
+            <a:ext cx="12192000" cy="2404863"/>
+          </a:xfrm>
+        </p:spPr>
+        <p:txBody>
+          <a:bodyPr anchor="ctr">
             <a:normAutofit/>
           </a:bodyPr>
           <a:lstStyle/>
           <a:p>
-            <a:r>
-              <a:rPr lang="en-US" altLang="zh-CN" sz="4800" b="1" dirty="0">
+            <a:pPr marL="0" indent="0" algn="ctr">
+              <a:buNone/>
+            </a:pPr>
+            <a:r>
+              <a:rPr lang="zh-TW" altLang="en-US" sz="6400" b="1" dirty="0">
                 <a:solidFill>
                   <a:srgbClr val="660033"/>
                 </a:solidFill>
-                <a:latin typeface="Microsoft JhengHei" panose="020B0604030504040204" pitchFamily="34" charset="-120"/>
-                <a:ea typeface="Microsoft JhengHei" panose="020B0604030504040204" pitchFamily="34" charset="-120"/>
+                <a:latin typeface="Microsoft JhengHei" pitchFamily="34" charset="-120"/>
+                <a:ea typeface="Microsoft JhengHei" pitchFamily="34" charset="-120"/>
               </a:rPr>
-              <a:t>【</a:t>
-            </a:r>
-            <a:r>
-              <a:rPr lang="zh-CN" altLang="en-US" sz="4800" b="1" dirty="0">
+              <a:t>願主教會復興  靈糧賜給各人</a:t>
+            </a:r>
+          </a:p>
+          <a:p>
+            <a:pPr marL="0" indent="0" algn="ctr">
+              <a:buNone/>
+            </a:pPr>
+            <a:r>
+              <a:rPr lang="zh-TW" altLang="en-US" sz="6400" b="1" dirty="0">
                 <a:solidFill>
                   <a:srgbClr val="660033"/>
                 </a:solidFill>
-                <a:latin typeface="Microsoft JhengHei" panose="020B0604030504040204" pitchFamily="34" charset="-120"/>
-                <a:ea typeface="Microsoft JhengHei" panose="020B0604030504040204" pitchFamily="34" charset="-120"/>
+                <a:latin typeface="Microsoft JhengHei" pitchFamily="34" charset="-120"/>
+                <a:ea typeface="Microsoft JhengHei" pitchFamily="34" charset="-120"/>
               </a:rPr>
-              <a:t>教會復興</a:t>
-            </a:r>
-            <a:r>
-              <a:rPr lang="en-US" altLang="zh-CN" sz="4800" b="1" dirty="0">
-                <a:solidFill>
-                  <a:srgbClr val="660033"/>
-                </a:solidFill>
-                <a:latin typeface="Microsoft JhengHei" panose="020B0604030504040204" pitchFamily="34" charset="-120"/>
-                <a:ea typeface="Microsoft JhengHei" panose="020B0604030504040204" pitchFamily="34" charset="-120"/>
-              </a:rPr>
-              <a:t>】</a:t>
-            </a:r>
-          </a:p>
-        </p:txBody>
-      </p:sp>
-      <p:sp>
-        <p:nvSpPr>
-          <p:cNvPr id="5" name="Content Placeholder 4"/>
-          <p:cNvSpPr>
-            <a:spLocks noGrp="1"/>
-          </p:cNvSpPr>
-          <p:nvPr>
-            <p:ph idx="1"/>
-          </p:nvPr>
-        </p:nvSpPr>
-        <p:spPr/>
-        <p:txBody>
-          <a:bodyPr>
-            <a:noAutofit/>
-          </a:bodyPr>
-          <a:lstStyle/>
-          <a:p>
-            <a:pPr marL="0" indent="0" algn="ctr">
-              <a:buNone/>
-            </a:pPr>
-            <a:r>
-              <a:rPr lang="zh-CN" altLang="zh-TW" sz="5400" b="1" dirty="0">
-                <a:solidFill>
-                  <a:srgbClr val="660033"/>
-                </a:solidFill>
-                <a:latin typeface="Microsoft JhengHei" panose="020B0604030504040204" pitchFamily="34" charset="-120"/>
-                <a:ea typeface="Microsoft JhengHei" panose="020B0604030504040204" pitchFamily="34" charset="-120"/>
-              </a:rPr>
-              <a:t>願主教會復興</a:t>
-            </a:r>
-          </a:p>
-          <a:p>
-            <a:pPr marL="0" indent="0" algn="ctr">
-              <a:buNone/>
-            </a:pPr>
-            <a:r>
-              <a:rPr lang="zh-CN" altLang="zh-TW" sz="5400" b="1" dirty="0">
-                <a:solidFill>
-                  <a:srgbClr val="660033"/>
-                </a:solidFill>
-                <a:latin typeface="Microsoft JhengHei" panose="020B0604030504040204" pitchFamily="34" charset="-120"/>
-                <a:ea typeface="Microsoft JhengHei" panose="020B0604030504040204" pitchFamily="34" charset="-120"/>
-              </a:rPr>
-              <a:t>聖靈感化人心</a:t>
-            </a:r>
-          </a:p>
-          <a:p>
-            <a:pPr marL="0" indent="0" algn="ctr">
-              <a:buNone/>
-            </a:pPr>
-            <a:r>
-              <a:rPr lang="zh-CN" altLang="zh-TW" sz="5400" b="1" dirty="0">
-                <a:solidFill>
-                  <a:srgbClr val="660033"/>
-                </a:solidFill>
-                <a:latin typeface="Microsoft JhengHei" panose="020B0604030504040204" pitchFamily="34" charset="-120"/>
-                <a:ea typeface="Microsoft JhengHei" panose="020B0604030504040204" pitchFamily="34" charset="-120"/>
-              </a:rPr>
-              <a:t>惡魔失敗聖徒得勝</a:t>
-            </a:r>
-          </a:p>
-          <a:p>
-            <a:pPr marL="0" indent="0" algn="ctr">
-              <a:buNone/>
-            </a:pPr>
-            <a:r>
-              <a:rPr lang="zh-CN" altLang="zh-TW" sz="5400" b="1" dirty="0">
-                <a:solidFill>
-                  <a:srgbClr val="660033"/>
-                </a:solidFill>
-                <a:latin typeface="Microsoft JhengHei" panose="020B0604030504040204" pitchFamily="34" charset="-120"/>
-                <a:ea typeface="Microsoft JhengHei" panose="020B0604030504040204" pitchFamily="34" charset="-120"/>
-              </a:rPr>
-              <a:t>榮耀歸主聖名</a:t>
-            </a:r>
-          </a:p>
-        </p:txBody>
-      </p:sp>
-      <p:sp>
-        <p:nvSpPr>
-          <p:cNvPr id="6" name="Text Box 1"/>
+              <a:t>將主言語永存在心  靠主得新生命</a:t>
+            </a:r>
+          </a:p>
+        </p:txBody>
+      </p:sp>
+      <p:sp>
+        <p:nvSpPr>
+          <p:cNvPr id="3" name="TextBox 2">
+            <a:extLst>
+              <a:ext uri="{FF2B5EF4-FFF2-40B4-BE49-F238E27FC236}">
+                <a16:creationId xmlns:a16="http://schemas.microsoft.com/office/drawing/2014/main" id="{E8A3797A-6F24-50DC-5B63-CBB0CD6B1812}"/>
+              </a:ext>
+            </a:extLst>
+          </p:cNvPr>
           <p:cNvSpPr txBox="1"/>
           <p:nvPr/>
         </p:nvSpPr>
         <p:spPr>
           <a:xfrm>
-            <a:off x="1631504" y="1700808"/>
-            <a:ext cx="1055440" cy="923330"/>
+            <a:off x="0" y="5061182"/>
+            <a:ext cx="12192000" cy="646331"/>
           </a:xfrm>
           <a:prstGeom prst="rect">
             <a:avLst/>
           </a:prstGeom>
           <a:noFill/>
-          <a:ln w="9525">
-            <a:noFill/>
-            <a:miter lim="800000"/>
-          </a:ln>
         </p:spPr>
         <p:txBody>
-          <a:bodyPr wrap="square">
+          <a:bodyPr wrap="square" rtlCol="0">
             <a:spAutoFit/>
           </a:bodyPr>
           <a:lstStyle/>
           <a:p>
             <a:pPr algn="ctr"/>
             <a:r>
-              <a:rPr lang="en-US" sz="5400" b="1" dirty="0">
+              <a:rPr lang="en-US" sz="3600" b="1" dirty="0">
                 <a:solidFill>
                   <a:srgbClr val="660033"/>
                 </a:solidFill>
+                <a:latin typeface="+mj-lt"/>
               </a:rPr>
-              <a:t>5</a:t>
-            </a:r>
-            <a:r>
-              <a:rPr lang="en-US" sz="5400" b="1" dirty="0" smtClean="0">
+              <a:t>( 4 / 5 )</a:t>
+            </a:r>
+            <a:endParaRPr lang="vi-VN" sz="3600" b="1" dirty="0">
+              <a:solidFill>
+                <a:srgbClr val="660033"/>
+              </a:solidFill>
+              <a:latin typeface="+mj-lt"/>
+            </a:endParaRPr>
+          </a:p>
+        </p:txBody>
+      </p:sp>
+    </p:spTree>
+    <p:extLst>
+      <p:ext uri="{BB962C8B-B14F-4D97-AF65-F5344CB8AC3E}">
+        <p14:creationId xmlns:p14="http://schemas.microsoft.com/office/powerpoint/2010/main" val="46984734"/>
+      </p:ext>
+    </p:extLst>
+  </p:cSld>
+  <p:clrMapOvr>
+    <a:masterClrMapping/>
+  </p:clrMapOvr>
+</p:sld>
+</file>
+
+<file path=ppt/slides/slide6.xml><?xml version="1.0" encoding="utf-8"?>
+<p:sld xmlns:a="http://schemas.openxmlformats.org/drawingml/2006/main" xmlns:r="http://schemas.openxmlformats.org/officeDocument/2006/relationships" xmlns:p="http://schemas.openxmlformats.org/presentationml/2006/main">
+  <p:cSld>
+    <p:spTree>
+      <p:nvGrpSpPr>
+        <p:cNvPr id="1" name="">
+          <a:extLst>
+            <a:ext uri="{FF2B5EF4-FFF2-40B4-BE49-F238E27FC236}">
+              <a16:creationId xmlns:a16="http://schemas.microsoft.com/office/drawing/2014/main" id="{71A604BF-BDD4-6388-2475-4965DC6FC5FC}"/>
+            </a:ext>
+          </a:extLst>
+        </p:cNvPr>
+        <p:cNvGrpSpPr/>
+        <p:nvPr/>
+      </p:nvGrpSpPr>
+      <p:grpSpPr>
+        <a:xfrm>
+          <a:off x="0" y="0"/>
+          <a:ext cx="0" cy="0"/>
+          <a:chOff x="0" y="0"/>
+          <a:chExt cx="0" cy="0"/>
+        </a:xfrm>
+      </p:grpSpPr>
+      <p:sp>
+        <p:nvSpPr>
+          <p:cNvPr id="5" name="內容版面配置區 4">
+            <a:extLst>
+              <a:ext uri="{FF2B5EF4-FFF2-40B4-BE49-F238E27FC236}">
+                <a16:creationId xmlns:a16="http://schemas.microsoft.com/office/drawing/2014/main" id="{6194C654-D210-A669-7DDE-9179E6B3B08C}"/>
+              </a:ext>
+            </a:extLst>
+          </p:cNvPr>
+          <p:cNvSpPr>
+            <a:spLocks noGrp="1"/>
+          </p:cNvSpPr>
+          <p:nvPr>
+            <p:ph idx="1"/>
+          </p:nvPr>
+        </p:nvSpPr>
+        <p:spPr>
+          <a:xfrm>
+            <a:off x="0" y="2084851"/>
+            <a:ext cx="12192000" cy="2404863"/>
+          </a:xfrm>
+        </p:spPr>
+        <p:txBody>
+          <a:bodyPr anchor="ctr">
+            <a:normAutofit/>
+          </a:bodyPr>
+          <a:lstStyle/>
+          <a:p>
+            <a:pPr marL="0" indent="0" algn="ctr">
+              <a:buNone/>
+            </a:pPr>
+            <a:r>
+              <a:rPr lang="zh-TW" altLang="en-US" sz="6400" b="1" dirty="0">
                 <a:solidFill>
                   <a:srgbClr val="660033"/>
                 </a:solidFill>
+                <a:latin typeface="Microsoft JhengHei" pitchFamily="34" charset="-120"/>
+                <a:ea typeface="Microsoft JhengHei" pitchFamily="34" charset="-120"/>
               </a:rPr>
-              <a:t>.</a:t>
-            </a:r>
-            <a:endParaRPr lang="en-US" sz="5400" b="1" dirty="0">
+              <a:t>願主教會復興  聖靈感化人心</a:t>
+            </a:r>
+          </a:p>
+          <a:p>
+            <a:pPr marL="0" indent="0" algn="ctr">
+              <a:buNone/>
+            </a:pPr>
+            <a:r>
+              <a:rPr lang="zh-TW" altLang="en-US" sz="6400" b="1" dirty="0">
+                <a:solidFill>
+                  <a:srgbClr val="660033"/>
+                </a:solidFill>
+                <a:latin typeface="Microsoft JhengHei" pitchFamily="34" charset="-120"/>
+                <a:ea typeface="Microsoft JhengHei" pitchFamily="34" charset="-120"/>
+              </a:rPr>
+              <a:t>惡魔失敗聖徒得勝  榮耀歸主聖名</a:t>
+            </a:r>
+          </a:p>
+        </p:txBody>
+      </p:sp>
+      <p:sp>
+        <p:nvSpPr>
+          <p:cNvPr id="3" name="TextBox 2">
+            <a:extLst>
+              <a:ext uri="{FF2B5EF4-FFF2-40B4-BE49-F238E27FC236}">
+                <a16:creationId xmlns:a16="http://schemas.microsoft.com/office/drawing/2014/main" id="{CE8BD9B5-2DED-182F-3CD0-EFCF4A2C7A25}"/>
+              </a:ext>
+            </a:extLst>
+          </p:cNvPr>
+          <p:cNvSpPr txBox="1"/>
+          <p:nvPr/>
+        </p:nvSpPr>
+        <p:spPr>
+          <a:xfrm>
+            <a:off x="0" y="5061182"/>
+            <a:ext cx="12192000" cy="646331"/>
+          </a:xfrm>
+          <a:prstGeom prst="rect">
+            <a:avLst/>
+          </a:prstGeom>
+          <a:noFill/>
+        </p:spPr>
+        <p:txBody>
+          <a:bodyPr wrap="square" rtlCol="0">
+            <a:spAutoFit/>
+          </a:bodyPr>
+          <a:lstStyle/>
+          <a:p>
+            <a:pPr algn="ctr"/>
+            <a:r>
+              <a:rPr lang="en-US" sz="3600" b="1" dirty="0">
+                <a:solidFill>
+                  <a:srgbClr val="660033"/>
+                </a:solidFill>
+                <a:latin typeface="+mj-lt"/>
+              </a:rPr>
+              <a:t>( 5 / 5 )</a:t>
+            </a:r>
+            <a:endParaRPr lang="vi-VN" sz="3600" b="1" dirty="0">
               <a:solidFill>
                 <a:srgbClr val="660033"/>
               </a:solidFill>
+              <a:latin typeface="+mj-lt"/>
             </a:endParaRPr>
           </a:p>
         </p:txBody>
@@ -4724,7 +4516,7 @@
     </p:spTree>
     <p:extLst>
       <p:ext uri="{BB962C8B-B14F-4D97-AF65-F5344CB8AC3E}">
-        <p14:creationId xmlns:p14="http://schemas.microsoft.com/office/powerpoint/2010/main" val="961359452"/>
+        <p14:creationId xmlns:p14="http://schemas.microsoft.com/office/powerpoint/2010/main" val="3270911640"/>
       </p:ext>
     </p:extLst>
   </p:cSld>
